--- a/docs/ujs-presentation/EWUMS-UJS-Presentation.pptx
+++ b/docs/ujs-presentation/EWUMS-UJS-Presentation.pptx
@@ -661,7 +661,7 @@
           <a:lstStyle/>
           <a:p>
             <a:r>
-              <a:t>From proposal to final bill, every step is logged with role-based approvals (JE → AE → EE → Finance).</a:t>
+              <a:t>Walk through the 12-stage DPR approval pipeline — from division proposal to tender publication.</a:t>
             </a:r>
           </a:p>
         </p:txBody>
@@ -731,7 +731,7 @@
           <a:lstStyle/>
           <a:p>
             <a:r>
-              <a:t>Live demo — 2 minutes. Rehearse with demo-seed.sql applied.</a:t>
+              <a:t>Only Super Admin creates schemes. Division is tagged at creation — all Karanprayag staff see the same project end-to-end.</a:t>
             </a:r>
           </a:p>
         </p:txBody>
@@ -801,7 +801,7 @@
           <a:lstStyle/>
           <a:p>
             <a:r>
-              <a:t>Live demo — 4 minutes.</a:t>
+              <a:t>Rehearse full proposal-to-revenue + complaint flow before department meeting.</a:t>
             </a:r>
           </a:p>
         </p:txBody>
@@ -827,76 +827,6 @@
 </file>
 
 <file path=ppt/notesSlides/notesSlide6.xml><?xml version="1.0" encoding="utf-8"?>
-<p:notes xmlns:a="http://schemas.openxmlformats.org/drawingml/2006/main" xmlns:p="http://schemas.openxmlformats.org/presentationml/2006/main" xmlns:r="http://schemas.openxmlformats.org/officeDocument/2006/relationships">
-  <p:cSld>
-    <p:spTree>
-      <p:nvGrpSpPr>
-        <p:cNvPr id="1" name=""/>
-        <p:cNvGrpSpPr/>
-        <p:nvPr/>
-      </p:nvGrpSpPr>
-      <p:grpSpPr>
-        <a:xfrm>
-          <a:off x="0" y="0"/>
-          <a:ext cx="0" cy="0"/>
-          <a:chOff x="0" y="0"/>
-          <a:chExt cx="0" cy="0"/>
-        </a:xfrm>
-      </p:grpSpPr>
-      <p:sp>
-        <p:nvSpPr>
-          <p:cNvPr id="2" name="Slide Image Placeholder 1"/>
-          <p:cNvSpPr>
-            <a:spLocks noGrp="1"/>
-          </p:cNvSpPr>
-          <p:nvPr>
-            <p:ph type="sldImg" idx="2"/>
-          </p:nvPr>
-        </p:nvSpPr>
-        <p:spPr/>
-      </p:sp>
-      <p:sp>
-        <p:nvSpPr>
-          <p:cNvPr id="3" name="Notes Placeholder 2"/>
-          <p:cNvSpPr>
-            <a:spLocks noGrp="1"/>
-          </p:cNvSpPr>
-          <p:nvPr>
-            <p:ph type="body" idx="3" sz="quarter"/>
-          </p:nvPr>
-        </p:nvSpPr>
-        <p:spPr/>
-        <p:txBody>
-          <a:bodyPr/>
-          <a:lstStyle/>
-          <a:p>
-            <a:r>
-              <a:t>Live demo — 4 minutes.</a:t>
-            </a:r>
-          </a:p>
-        </p:txBody>
-      </p:sp>
-      <p:sp>
-        <p:nvSpPr>
-          <p:cNvPr id="4" name="Slide Number Placeholder 3"/>
-          <p:cNvSpPr>
-            <a:spLocks noGrp="1"/>
-          </p:cNvSpPr>
-          <p:nvPr>
-            <p:ph type="sldNum" idx="5" sz="quarter"/>
-          </p:nvPr>
-        </p:nvSpPr>
-        <p:spPr/>
-      </p:sp>
-    </p:spTree>
-  </p:cSld>
-  <p:clrMapOvr>
-    <a:masterClrMapping/>
-  </p:clrMapOvr>
-</p:notes>
-</file>
-
-<file path=ppt/notesSlides/notesSlide7.xml><?xml version="1.0" encoding="utf-8"?>
 <p:notes xmlns:a="http://schemas.openxmlformats.org/drawingml/2006/main" xmlns:p="http://schemas.openxmlformats.org/presentationml/2006/main" xmlns:r="http://schemas.openxmlformats.org/officeDocument/2006/relationships">
   <p:cSld>
     <p:spTree>
@@ -4346,7 +4276,7 @@
                 </a:solidFill>
                 <a:latin typeface="Calibri"/>
               </a:rPr>
-              <a:t>Demo 3 — Revenue &amp; Citizen Service</a:t>
+              <a:t>Stage 10: Citizen Complaints (Jal Mitra Only)</a:t>
             </a:r>
           </a:p>
           <a:p>
@@ -4357,21 +4287,245 @@
                 </a:solidFill>
                 <a:latin typeface="Calibri"/>
               </a:rPr>
-              <a:t>बिलिंग एवं शिकायत</a:t>
-            </a:r>
-          </a:p>
-        </p:txBody>
-      </p:sp>
-      <p:sp>
-        <p:nvSpPr>
-          <p:cNvPr id="5" name="TextBox 4"/>
+              <a:t>शिकायत — नागरिक दर्ज करे, विभाग निपटाए</a:t>
+            </a:r>
+          </a:p>
+        </p:txBody>
+      </p:sp>
+      <p:graphicFrame>
+        <p:nvGraphicFramePr>
+          <p:cNvPr id="5" name="Table 4"/>
+          <p:cNvGraphicFramePr>
+            <a:graphicFrameLocks noGrp="1"/>
+          </p:cNvGraphicFramePr>
+          <p:nvPr/>
+        </p:nvGraphicFramePr>
+        <p:xfrm>
+          <a:off x="548640" y="1600200"/>
+          <a:ext cx="11094414" cy="1828800"/>
+        </p:xfrm>
+        <a:graphic>
+          <a:graphicData uri="http://schemas.openxmlformats.org/drawingml/2006/table">
+            <a:tbl>
+              <a:tblPr firstRow="1" bandRow="1">
+                <a:tableStyleId>{5C22544A-7EE6-4342-B048-85BDC9FD1C3A}</a:tableStyleId>
+              </a:tblPr>
+              <a:tblGrid>
+                <a:gridCol w="5547207"/>
+                <a:gridCol w="5547207"/>
+              </a:tblGrid>
+              <a:tr h="365760">
+                <a:tc>
+                  <a:txBody>
+                    <a:bodyPr/>
+                    <a:lstStyle/>
+                    <a:p>
+                      <a:r>
+                        <a:rPr sz="1200" b="1">
+                          <a:solidFill>
+                            <a:srgbClr val="FFFFFF"/>
+                          </a:solidFill>
+                          <a:latin typeface="Calibri"/>
+                        </a:rPr>
+                        <a:t>Who</a:t>
+                      </a:r>
+                    </a:p>
+                  </a:txBody>
+                  <a:tcPr>
+                    <a:solidFill>
+                      <a:srgbClr val="0F172A"/>
+                    </a:solidFill>
+                  </a:tcPr>
+                </a:tc>
+                <a:tc>
+                  <a:txBody>
+                    <a:bodyPr/>
+                    <a:lstStyle/>
+                    <a:p>
+                      <a:r>
+                        <a:rPr sz="1200" b="1">
+                          <a:solidFill>
+                            <a:srgbClr val="FFFFFF"/>
+                          </a:solidFill>
+                          <a:latin typeface="Calibri"/>
+                        </a:rPr>
+                        <a:t>Action</a:t>
+                      </a:r>
+                    </a:p>
+                  </a:txBody>
+                  <a:tcPr>
+                    <a:solidFill>
+                      <a:srgbClr val="0F172A"/>
+                    </a:solidFill>
+                  </a:tcPr>
+                </a:tc>
+              </a:tr>
+              <a:tr h="365760">
+                <a:tc>
+                  <a:txBody>
+                    <a:bodyPr/>
+                    <a:lstStyle/>
+                    <a:p>
+                      <a:r>
+                        <a:rPr sz="1100" b="0">
+                          <a:solidFill>
+                            <a:srgbClr val="1E293B"/>
+                          </a:solidFill>
+                          <a:latin typeface="Calibri"/>
+                        </a:rPr>
+                        <a:t>Consumer</a:t>
+                      </a:r>
+                    </a:p>
+                  </a:txBody>
+                  <a:tcPr/>
+                </a:tc>
+                <a:tc>
+                  <a:txBody>
+                    <a:bodyPr/>
+                    <a:lstStyle/>
+                    <a:p>
+                      <a:r>
+                        <a:rPr sz="1100" b="0">
+                          <a:solidFill>
+                            <a:srgbClr val="1E293B"/>
+                          </a:solidFill>
+                          <a:latin typeface="Calibri"/>
+                        </a:rPr>
+                        <a:t>Registers complaint via Jal Mitra (/portal)</a:t>
+                      </a:r>
+                    </a:p>
+                  </a:txBody>
+                  <a:tcPr/>
+                </a:tc>
+              </a:tr>
+              <a:tr h="365760">
+                <a:tc>
+                  <a:txBody>
+                    <a:bodyPr/>
+                    <a:lstStyle/>
+                    <a:p>
+                      <a:r>
+                        <a:rPr sz="1100" b="0">
+                          <a:solidFill>
+                            <a:srgbClr val="1E293B"/>
+                          </a:solidFill>
+                          <a:latin typeface="Calibri"/>
+                        </a:rPr>
+                        <a:t>EE</a:t>
+                      </a:r>
+                    </a:p>
+                  </a:txBody>
+                  <a:tcPr/>
+                </a:tc>
+                <a:tc>
+                  <a:txBody>
+                    <a:bodyPr/>
+                    <a:lstStyle/>
+                    <a:p>
+                      <a:r>
+                        <a:rPr sz="1100" b="0">
+                          <a:solidFill>
+                            <a:srgbClr val="1E293B"/>
+                          </a:solidFill>
+                          <a:latin typeface="Calibri"/>
+                        </a:rPr>
+                        <a:t>Sees ticket → assigns JE</a:t>
+                      </a:r>
+                    </a:p>
+                  </a:txBody>
+                  <a:tcPr/>
+                </a:tc>
+              </a:tr>
+              <a:tr h="365760">
+                <a:tc>
+                  <a:txBody>
+                    <a:bodyPr/>
+                    <a:lstStyle/>
+                    <a:p>
+                      <a:r>
+                        <a:rPr sz="1100" b="0">
+                          <a:solidFill>
+                            <a:srgbClr val="1E293B"/>
+                          </a:solidFill>
+                          <a:latin typeface="Calibri"/>
+                        </a:rPr>
+                        <a:t>JE</a:t>
+                      </a:r>
+                    </a:p>
+                  </a:txBody>
+                  <a:tcPr/>
+                </a:tc>
+                <a:tc>
+                  <a:txBody>
+                    <a:bodyPr/>
+                    <a:lstStyle/>
+                    <a:p>
+                      <a:r>
+                        <a:rPr sz="1100" b="0">
+                          <a:solidFill>
+                            <a:srgbClr val="1E293B"/>
+                          </a:solidFill>
+                          <a:latin typeface="Calibri"/>
+                        </a:rPr>
+                        <a:t>Resolves in field</a:t>
+                      </a:r>
+                    </a:p>
+                  </a:txBody>
+                  <a:tcPr/>
+                </a:tc>
+              </a:tr>
+              <a:tr h="365760">
+                <a:tc>
+                  <a:txBody>
+                    <a:bodyPr/>
+                    <a:lstStyle/>
+                    <a:p>
+                      <a:r>
+                        <a:rPr sz="1100" b="0">
+                          <a:solidFill>
+                            <a:srgbClr val="1E293B"/>
+                          </a:solidFill>
+                          <a:latin typeface="Calibri"/>
+                        </a:rPr>
+                        <a:t>System</a:t>
+                      </a:r>
+                    </a:p>
+                  </a:txBody>
+                  <a:tcPr/>
+                </a:tc>
+                <a:tc>
+                  <a:txBody>
+                    <a:bodyPr/>
+                    <a:lstStyle/>
+                    <a:p>
+                      <a:r>
+                        <a:rPr sz="1100" b="0">
+                          <a:solidFill>
+                            <a:srgbClr val="1E293B"/>
+                          </a:solidFill>
+                          <a:latin typeface="Calibri"/>
+                        </a:rPr>
+                        <a:t>Email alert on assignment</a:t>
+                      </a:r>
+                    </a:p>
+                  </a:txBody>
+                  <a:tcPr/>
+                </a:tc>
+              </a:tr>
+            </a:tbl>
+          </a:graphicData>
+        </a:graphic>
+      </p:graphicFrame>
+      <p:sp>
+        <p:nvSpPr>
+          <p:cNvPr id="6" name="TextBox 5"/>
           <p:cNvSpPr txBox="1"/>
           <p:nvPr/>
         </p:nvSpPr>
         <p:spPr>
           <a:xfrm>
-            <a:off x="685800" y="1600200"/>
-            <a:ext cx="10820095" cy="4617720"/>
+            <a:off x="548640" y="5989320"/>
+            <a:ext cx="11094415" cy="411480"/>
           </a:xfrm>
           <a:prstGeom prst="rect">
             <a:avLst/>
@@ -4379,168 +4533,19 @@
           <a:noFill/>
         </p:spPr>
         <p:txBody>
-          <a:bodyPr wrap="square">
+          <a:bodyPr wrap="none">
             <a:spAutoFit/>
           </a:bodyPr>
           <a:lstStyle/>
           <a:p>
-            <a:pPr>
-              <a:spcAft>
-                <a:spcPts val="800"/>
-              </a:spcAft>
-            </a:pPr>
-            <a:r>
-              <a:rPr sz="1400" b="0">
-                <a:solidFill>
-                  <a:srgbClr val="1E293B"/>
-                </a:solidFill>
-                <a:latin typeface="Calibri"/>
-              </a:rPr>
-              <a:t>•  Login: accounts.hrr@egip.local / Accounts@123 (Haridwar Rural)</a:t>
-            </a:r>
-          </a:p>
-          <a:p>
-            <a:pPr>
-              <a:spcAft>
-                <a:spcPts val="800"/>
-              </a:spcAft>
-            </a:pPr>
-            <a:r>
-              <a:rPr sz="1400" b="0">
-                <a:solidFill>
-                  <a:srgbClr val="1E293B"/>
-                </a:solidFill>
-                <a:latin typeface="Calibri"/>
-              </a:rPr>
-              <a:t>•  Navigate: Billing → Revenue KPIs</a:t>
-            </a:r>
-          </a:p>
-          <a:p>
-            <a:pPr>
-              <a:spcAft>
-                <a:spcPts val="800"/>
-              </a:spcAft>
-            </a:pPr>
-            <a:r>
-              <a:rPr sz="1400" b="0">
-                <a:solidFill>
-                  <a:srgbClr val="1E293B"/>
-                </a:solidFill>
-                <a:latin typeface="Calibri"/>
-              </a:rPr>
-              <a:t>•  </a:t>
-            </a:r>
-          </a:p>
-          <a:p>
-            <a:pPr>
-              <a:spcAft>
-                <a:spcPts val="800"/>
-              </a:spcAft>
-            </a:pPr>
-            <a:r>
-              <a:rPr sz="1400" b="0">
-                <a:solidFill>
-                  <a:srgbClr val="1E293B"/>
-                </a:solidFill>
-                <a:latin typeface="Calibri"/>
-              </a:rPr>
-              <a:t>•  Show:</a:t>
-            </a:r>
-          </a:p>
-          <a:p>
-            <a:pPr>
-              <a:spcAft>
-                <a:spcPts val="800"/>
-              </a:spcAft>
-            </a:pPr>
-            <a:r>
-              <a:rPr sz="1400" b="0">
-                <a:solidFill>
-                  <a:srgbClr val="1E293B"/>
-                </a:solidFill>
-                <a:latin typeface="Calibri"/>
-              </a:rPr>
-              <a:t>•    • Consumer connections and collection efficiency</a:t>
-            </a:r>
-          </a:p>
-          <a:p>
-            <a:pPr>
-              <a:spcAft>
-                <a:spcPts val="800"/>
-              </a:spcAft>
-            </a:pPr>
-            <a:r>
-              <a:rPr sz="1400" b="0">
-                <a:solidFill>
-                  <a:srgbClr val="1E293B"/>
-                </a:solidFill>
-                <a:latin typeface="Calibri"/>
-              </a:rPr>
-              <a:t>•    • Sample bill for Bahadarabad consumer</a:t>
-            </a:r>
-          </a:p>
-          <a:p>
-            <a:pPr>
-              <a:spcAft>
-                <a:spcPts val="800"/>
-              </a:spcAft>
-            </a:pPr>
-            <a:r>
-              <a:rPr sz="1400" b="0">
-                <a:solidFill>
-                  <a:srgbClr val="1E293B"/>
-                </a:solidFill>
-                <a:latin typeface="Calibri"/>
-              </a:rPr>
-              <a:t>•    • Complaint register (if seeded)</a:t>
-            </a:r>
-          </a:p>
-          <a:p>
-            <a:pPr>
-              <a:spcAft>
-                <a:spcPts val="800"/>
-              </a:spcAft>
-            </a:pPr>
-            <a:r>
-              <a:rPr sz="1400" b="0">
-                <a:solidFill>
-                  <a:srgbClr val="1E293B"/>
-                </a:solidFill>
-                <a:latin typeface="Calibri"/>
-              </a:rPr>
-              <a:t>•    • Optional: Jal Mitra consumer portal — FHTC-HRR-DEMO-001</a:t>
-            </a:r>
-          </a:p>
-          <a:p>
-            <a:pPr>
-              <a:spcAft>
-                <a:spcPts val="800"/>
-              </a:spcAft>
-            </a:pPr>
-            <a:r>
-              <a:rPr sz="1400" b="0">
-                <a:solidFill>
-                  <a:srgbClr val="1E293B"/>
-                </a:solidFill>
-                <a:latin typeface="Calibri"/>
-              </a:rPr>
-              <a:t>•  </a:t>
-            </a:r>
-          </a:p>
-          <a:p>
-            <a:pPr>
-              <a:spcAft>
-                <a:spcPts val="800"/>
-              </a:spcAft>
-            </a:pPr>
-            <a:r>
-              <a:rPr sz="1400" b="0">
-                <a:solidFill>
-                  <a:srgbClr val="1E293B"/>
-                </a:solidFill>
-                <a:latin typeface="Calibri"/>
-              </a:rPr>
-              <a:t>•  Script: "Post-commissioning, the same platform manages tariffs, meter readings, and consumer self-service."</a:t>
+            <a:r>
+              <a:rPr sz="1100" b="0">
+                <a:solidFill>
+                  <a:srgbClr val="64748B"/>
+                </a:solidFill>
+                <a:latin typeface="Calibri"/>
+              </a:rPr>
+              <a:t>IMPORTANT: Staff do NOT register complaints — only consumers do. Flow: Ticket Generated → Assigned → Resolution → Feedback → Closed</a:t>
             </a:r>
           </a:p>
         </p:txBody>
@@ -4678,7 +4683,7 @@
                 </a:solidFill>
                 <a:latin typeface="Calibri"/>
               </a:rPr>
-              <a:t>Field Operations — Mobile Ready</a:t>
+              <a:t>Stage 11–12: Command Center &amp; Audit</a:t>
             </a:r>
           </a:p>
           <a:p>
@@ -4689,7 +4694,7 @@
                 </a:solidFill>
                 <a:latin typeface="Calibri"/>
               </a:rPr>
-              <a:t>मोबाइल — field billing और GPS capture</a:t>
+              <a:t>कमांड सेंटर + ऑडिट ट्रेल</a:t>
             </a:r>
           </a:p>
         </p:txBody>
@@ -4728,7 +4733,7 @@
                 </a:solidFill>
                 <a:latin typeface="Calibri"/>
               </a:rPr>
-              <a:t>•  Mobile billing route (/mobile-billing) — meter reading, offline queue</a:t>
+              <a:t>•  KPIs: assets, progress, revenue, complaints, SLA</a:t>
             </a:r>
           </a:p>
           <a:p>
@@ -4744,7 +4749,7 @@
                 </a:solidFill>
                 <a:latin typeface="Calibri"/>
               </a:rPr>
-              <a:t>•  GPS and photo evidence on readings</a:t>
+              <a:t>•  Division or statewide view (/dashboard)</a:t>
             </a:r>
           </a:p>
           <a:p>
@@ -4760,7 +4765,7 @@
                 </a:solidFill>
                 <a:latin typeface="Calibri"/>
               </a:rPr>
-              <a:t>•  Consumer portal — OTP login, Hindi/English/Garhwali/Kumaoni (Jal Mitra)</a:t>
+              <a:t>•  Every user action logged — workflows, map access, approvals</a:t>
             </a:r>
           </a:p>
           <a:p>
@@ -4776,7 +4781,41 @@
                 </a:solidFill>
                 <a:latin typeface="Calibri"/>
               </a:rPr>
-              <a:t>•  QR asset identity (partial — scan API live, dedicated app roadmap)</a:t>
+              <a:t>•  Audit Trail page — filter by user, division, last 24 hours</a:t>
+            </a:r>
+          </a:p>
+        </p:txBody>
+      </p:sp>
+      <p:sp>
+        <p:nvSpPr>
+          <p:cNvPr id="6" name="TextBox 5"/>
+          <p:cNvSpPr txBox="1"/>
+          <p:nvPr/>
+        </p:nvSpPr>
+        <p:spPr>
+          <a:xfrm>
+            <a:off x="548640" y="5989320"/>
+            <a:ext cx="11094415" cy="411480"/>
+          </a:xfrm>
+          <a:prstGeom prst="rect">
+            <a:avLst/>
+          </a:prstGeom>
+          <a:noFill/>
+        </p:spPr>
+        <p:txBody>
+          <a:bodyPr wrap="none">
+            <a:spAutoFit/>
+          </a:bodyPr>
+          <a:lstStyle/>
+          <a:p>
+            <a:r>
+              <a:rPr sz="1100" b="0">
+                <a:solidFill>
+                  <a:srgbClr val="64748B"/>
+                </a:solidFill>
+                <a:latin typeface="Calibri"/>
+              </a:rPr>
+              <a:t>Screens: /dashboard · /admin/audit</a:t>
             </a:r>
           </a:p>
         </p:txBody>
@@ -4914,7 +4953,7 @@
                 </a:solidFill>
                 <a:latin typeface="Calibri"/>
               </a:rPr>
-              <a:t>Trust &amp; Compliance</a:t>
+              <a:t>Live Demo — Karanprayag Flow (15 min)</a:t>
             </a:r>
           </a:p>
           <a:p>
@@ -4925,21 +4964,396 @@
                 </a:solidFill>
                 <a:latin typeface="Calibri"/>
               </a:rPr>
-              <a:t>सुरक्षा, audit trail और division access control</a:t>
-            </a:r>
-          </a:p>
-        </p:txBody>
-      </p:sp>
-      <p:sp>
-        <p:nvSpPr>
-          <p:cNvPr id="5" name="TextBox 4"/>
+              <a:t>लाइव डेमो — करणप्रयाग प्रवाह</a:t>
+            </a:r>
+          </a:p>
+        </p:txBody>
+      </p:sp>
+      <p:graphicFrame>
+        <p:nvGraphicFramePr>
+          <p:cNvPr id="5" name="Table 4"/>
+          <p:cNvGraphicFramePr>
+            <a:graphicFrameLocks noGrp="1"/>
+          </p:cNvGraphicFramePr>
+          <p:nvPr/>
+        </p:nvGraphicFramePr>
+        <p:xfrm>
+          <a:off x="548640" y="1600200"/>
+          <a:ext cx="11094414" cy="2194560"/>
+        </p:xfrm>
+        <a:graphic>
+          <a:graphicData uri="http://schemas.openxmlformats.org/drawingml/2006/table">
+            <a:tbl>
+              <a:tblPr firstRow="1" bandRow="1">
+                <a:tableStyleId>{5C22544A-7EE6-4342-B048-85BDC9FD1C3A}</a:tableStyleId>
+              </a:tblPr>
+              <a:tblGrid>
+                <a:gridCol w="3698138"/>
+                <a:gridCol w="3698138"/>
+                <a:gridCol w="3698138"/>
+              </a:tblGrid>
+              <a:tr h="365760">
+                <a:tc>
+                  <a:txBody>
+                    <a:bodyPr/>
+                    <a:lstStyle/>
+                    <a:p>
+                      <a:r>
+                        <a:rPr sz="1200" b="1">
+                          <a:solidFill>
+                            <a:srgbClr val="FFFFFF"/>
+                          </a:solidFill>
+                          <a:latin typeface="Calibri"/>
+                        </a:rPr>
+                        <a:t>Step</a:t>
+                      </a:r>
+                    </a:p>
+                  </a:txBody>
+                  <a:tcPr>
+                    <a:solidFill>
+                      <a:srgbClr val="0F172A"/>
+                    </a:solidFill>
+                  </a:tcPr>
+                </a:tc>
+                <a:tc>
+                  <a:txBody>
+                    <a:bodyPr/>
+                    <a:lstStyle/>
+                    <a:p>
+                      <a:r>
+                        <a:rPr sz="1200" b="1">
+                          <a:solidFill>
+                            <a:srgbClr val="FFFFFF"/>
+                          </a:solidFill>
+                          <a:latin typeface="Calibri"/>
+                        </a:rPr>
+                        <a:t>Who</a:t>
+                      </a:r>
+                    </a:p>
+                  </a:txBody>
+                  <a:tcPr>
+                    <a:solidFill>
+                      <a:srgbClr val="0F172A"/>
+                    </a:solidFill>
+                  </a:tcPr>
+                </a:tc>
+                <a:tc>
+                  <a:txBody>
+                    <a:bodyPr/>
+                    <a:lstStyle/>
+                    <a:p>
+                      <a:r>
+                        <a:rPr sz="1200" b="1">
+                          <a:solidFill>
+                            <a:srgbClr val="FFFFFF"/>
+                          </a:solidFill>
+                          <a:latin typeface="Calibri"/>
+                        </a:rPr>
+                        <a:t>Action</a:t>
+                      </a:r>
+                    </a:p>
+                  </a:txBody>
+                  <a:tcPr>
+                    <a:solidFill>
+                      <a:srgbClr val="0F172A"/>
+                    </a:solidFill>
+                  </a:tcPr>
+                </a:tc>
+              </a:tr>
+              <a:tr h="365760">
+                <a:tc>
+                  <a:txBody>
+                    <a:bodyPr/>
+                    <a:lstStyle/>
+                    <a:p>
+                      <a:r>
+                        <a:rPr sz="1100" b="0">
+                          <a:solidFill>
+                            <a:srgbClr val="1E293B"/>
+                          </a:solidFill>
+                          <a:latin typeface="Calibri"/>
+                        </a:rPr>
+                        <a:t>1</a:t>
+                      </a:r>
+                    </a:p>
+                  </a:txBody>
+                  <a:tcPr/>
+                </a:tc>
+                <a:tc>
+                  <a:txBody>
+                    <a:bodyPr/>
+                    <a:lstStyle/>
+                    <a:p>
+                      <a:r>
+                        <a:rPr sz="1100" b="0">
+                          <a:solidFill>
+                            <a:srgbClr val="1E293B"/>
+                          </a:solidFill>
+                          <a:latin typeface="Calibri"/>
+                        </a:rPr>
+                        <a:t>Admin</a:t>
+                      </a:r>
+                    </a:p>
+                  </a:txBody>
+                  <a:tcPr/>
+                </a:tc>
+                <a:tc>
+                  <a:txBody>
+                    <a:bodyPr/>
+                    <a:lstStyle/>
+                    <a:p>
+                      <a:r>
+                        <a:rPr sz="1100" b="0">
+                          <a:solidFill>
+                            <a:srgbClr val="1E293B"/>
+                          </a:solidFill>
+                          <a:latin typeface="Calibri"/>
+                        </a:rPr>
+                        <a:t>Create scheme (Karanprayag division)</a:t>
+                      </a:r>
+                    </a:p>
+                  </a:txBody>
+                  <a:tcPr/>
+                </a:tc>
+              </a:tr>
+              <a:tr h="365760">
+                <a:tc>
+                  <a:txBody>
+                    <a:bodyPr/>
+                    <a:lstStyle/>
+                    <a:p>
+                      <a:r>
+                        <a:rPr sz="1100" b="0">
+                          <a:solidFill>
+                            <a:srgbClr val="1E293B"/>
+                          </a:solidFill>
+                          <a:latin typeface="Calibri"/>
+                        </a:rPr>
+                        <a:t>2</a:t>
+                      </a:r>
+                    </a:p>
+                  </a:txBody>
+                  <a:tcPr/>
+                </a:tc>
+                <a:tc>
+                  <a:txBody>
+                    <a:bodyPr/>
+                    <a:lstStyle/>
+                    <a:p>
+                      <a:r>
+                        <a:rPr sz="1100" b="0">
+                          <a:solidFill>
+                            <a:srgbClr val="1E293B"/>
+                          </a:solidFill>
+                          <a:latin typeface="Calibri"/>
+                        </a:rPr>
+                        <a:t>Admin</a:t>
+                      </a:r>
+                    </a:p>
+                  </a:txBody>
+                  <a:tcPr/>
+                </a:tc>
+                <a:tc>
+                  <a:txBody>
+                    <a:bodyPr/>
+                    <a:lstStyle/>
+                    <a:p>
+                      <a:r>
+                        <a:rPr sz="1100" b="0">
+                          <a:solidFill>
+                            <a:srgbClr val="1E293B"/>
+                          </a:solidFill>
+                          <a:latin typeface="Calibri"/>
+                        </a:rPr>
+                        <a:t>Register consumer (FHTC + mobile)</a:t>
+                      </a:r>
+                    </a:p>
+                  </a:txBody>
+                  <a:tcPr/>
+                </a:tc>
+              </a:tr>
+              <a:tr h="365760">
+                <a:tc>
+                  <a:txBody>
+                    <a:bodyPr/>
+                    <a:lstStyle/>
+                    <a:p>
+                      <a:r>
+                        <a:rPr sz="1100" b="0">
+                          <a:solidFill>
+                            <a:srgbClr val="1E293B"/>
+                          </a:solidFill>
+                          <a:latin typeface="Calibri"/>
+                        </a:rPr>
+                        <a:t>3</a:t>
+                      </a:r>
+                    </a:p>
+                  </a:txBody>
+                  <a:tcPr/>
+                </a:tc>
+                <a:tc>
+                  <a:txBody>
+                    <a:bodyPr/>
+                    <a:lstStyle/>
+                    <a:p>
+                      <a:r>
+                        <a:rPr sz="1100" b="0">
+                          <a:solidFill>
+                            <a:srgbClr val="1E293B"/>
+                          </a:solidFill>
+                          <a:latin typeface="Calibri"/>
+                        </a:rPr>
+                        <a:t>Consumer</a:t>
+                      </a:r>
+                    </a:p>
+                  </a:txBody>
+                  <a:tcPr/>
+                </a:tc>
+                <a:tc>
+                  <a:txBody>
+                    <a:bodyPr/>
+                    <a:lstStyle/>
+                    <a:p>
+                      <a:r>
+                        <a:rPr sz="1100" b="0">
+                          <a:solidFill>
+                            <a:srgbClr val="1E293B"/>
+                          </a:solidFill>
+                          <a:latin typeface="Calibri"/>
+                        </a:rPr>
+                        <a:t>Jal Mitra — lodge complaint</a:t>
+                      </a:r>
+                    </a:p>
+                  </a:txBody>
+                  <a:tcPr/>
+                </a:tc>
+              </a:tr>
+              <a:tr h="365760">
+                <a:tc>
+                  <a:txBody>
+                    <a:bodyPr/>
+                    <a:lstStyle/>
+                    <a:p>
+                      <a:r>
+                        <a:rPr sz="1100" b="0">
+                          <a:solidFill>
+                            <a:srgbClr val="1E293B"/>
+                          </a:solidFill>
+                          <a:latin typeface="Calibri"/>
+                        </a:rPr>
+                        <a:t>4</a:t>
+                      </a:r>
+                    </a:p>
+                  </a:txBody>
+                  <a:tcPr/>
+                </a:tc>
+                <a:tc>
+                  <a:txBody>
+                    <a:bodyPr/>
+                    <a:lstStyle/>
+                    <a:p>
+                      <a:r>
+                        <a:rPr sz="1100" b="0">
+                          <a:solidFill>
+                            <a:srgbClr val="1E293B"/>
+                          </a:solidFill>
+                          <a:latin typeface="Calibri"/>
+                        </a:rPr>
+                        <a:t>EE</a:t>
+                      </a:r>
+                    </a:p>
+                  </a:txBody>
+                  <a:tcPr/>
+                </a:tc>
+                <a:tc>
+                  <a:txBody>
+                    <a:bodyPr/>
+                    <a:lstStyle/>
+                    <a:p>
+                      <a:r>
+                        <a:rPr sz="1100" b="0">
+                          <a:solidFill>
+                            <a:srgbClr val="1E293B"/>
+                          </a:solidFill>
+                          <a:latin typeface="Calibri"/>
+                        </a:rPr>
+                        <a:t>Complaints inbox — assign JE</a:t>
+                      </a:r>
+                    </a:p>
+                  </a:txBody>
+                  <a:tcPr/>
+                </a:tc>
+              </a:tr>
+              <a:tr h="365760">
+                <a:tc>
+                  <a:txBody>
+                    <a:bodyPr/>
+                    <a:lstStyle/>
+                    <a:p>
+                      <a:r>
+                        <a:rPr sz="1100" b="0">
+                          <a:solidFill>
+                            <a:srgbClr val="1E293B"/>
+                          </a:solidFill>
+                          <a:latin typeface="Calibri"/>
+                        </a:rPr>
+                        <a:t>5</a:t>
+                      </a:r>
+                    </a:p>
+                  </a:txBody>
+                  <a:tcPr/>
+                </a:tc>
+                <a:tc>
+                  <a:txBody>
+                    <a:bodyPr/>
+                    <a:lstStyle/>
+                    <a:p>
+                      <a:r>
+                        <a:rPr sz="1100" b="0">
+                          <a:solidFill>
+                            <a:srgbClr val="1E293B"/>
+                          </a:solidFill>
+                          <a:latin typeface="Calibri"/>
+                        </a:rPr>
+                        <a:t>All</a:t>
+                      </a:r>
+                    </a:p>
+                  </a:txBody>
+                  <a:tcPr/>
+                </a:tc>
+                <a:tc>
+                  <a:txBody>
+                    <a:bodyPr/>
+                    <a:lstStyle/>
+                    <a:p>
+                      <a:r>
+                        <a:rPr sz="1100" b="0">
+                          <a:solidFill>
+                            <a:srgbClr val="1E293B"/>
+                          </a:solidFill>
+                          <a:latin typeface="Calibri"/>
+                        </a:rPr>
+                        <a:t>Notification log + email alert</a:t>
+                      </a:r>
+                    </a:p>
+                  </a:txBody>
+                  <a:tcPr/>
+                </a:tc>
+              </a:tr>
+            </a:tbl>
+          </a:graphicData>
+        </a:graphic>
+      </p:graphicFrame>
+      <p:sp>
+        <p:nvSpPr>
+          <p:cNvPr id="6" name="TextBox 5"/>
           <p:cNvSpPr txBox="1"/>
           <p:nvPr/>
         </p:nvSpPr>
         <p:spPr>
           <a:xfrm>
-            <a:off x="685800" y="1691640"/>
-            <a:ext cx="10820095" cy="4526280"/>
+            <a:off x="548640" y="5989320"/>
+            <a:ext cx="11094415" cy="411480"/>
           </a:xfrm>
           <a:prstGeom prst="rect">
             <a:avLst/>
@@ -4947,109 +5361,6 @@
           <a:noFill/>
         </p:spPr>
         <p:txBody>
-          <a:bodyPr wrap="square">
-            <a:spAutoFit/>
-          </a:bodyPr>
-          <a:lstStyle/>
-          <a:p>
-            <a:pPr>
-              <a:spcAft>
-                <a:spcPts val="800"/>
-              </a:spcAft>
-            </a:pPr>
-            <a:r>
-              <a:rPr sz="1600" b="0">
-                <a:solidFill>
-                  <a:srgbClr val="1E293B"/>
-                </a:solidFill>
-                <a:latin typeface="Calibri"/>
-              </a:rPr>
-              <a:t>•  Role-based access — 25+ UJS roles (MD, SE, EE, JE, billing officer, etc.)</a:t>
-            </a:r>
-          </a:p>
-          <a:p>
-            <a:pPr>
-              <a:spcAft>
-                <a:spcPts val="800"/>
-              </a:spcAft>
-            </a:pPr>
-            <a:r>
-              <a:rPr sz="1600" b="0">
-                <a:solidFill>
-                  <a:srgbClr val="1E293B"/>
-                </a:solidFill>
-                <a:latin typeface="Calibri"/>
-              </a:rPr>
-              <a:t>•  Division isolation — Haridwar JE cannot see Dehradun North data</a:t>
-            </a:r>
-          </a:p>
-          <a:p>
-            <a:pPr>
-              <a:spcAft>
-                <a:spcPts val="800"/>
-              </a:spcAft>
-            </a:pPr>
-            <a:r>
-              <a:rPr sz="1600" b="0">
-                <a:solidFill>
-                  <a:srgbClr val="1E293B"/>
-                </a:solidFill>
-                <a:latin typeface="Calibri"/>
-              </a:rPr>
-              <a:t>•  Complete audit log — user actions, workflow events, map access</a:t>
-            </a:r>
-          </a:p>
-          <a:p>
-            <a:pPr>
-              <a:spcAft>
-                <a:spcPts val="800"/>
-              </a:spcAft>
-            </a:pPr>
-            <a:r>
-              <a:rPr sz="1600" b="0">
-                <a:solidFill>
-                  <a:srgbClr val="1E293B"/>
-                </a:solidFill>
-                <a:latin typeface="Calibri"/>
-              </a:rPr>
-              <a:t>•  Workflow engine — configurable JE → AE → EE → Finance chains</a:t>
-            </a:r>
-          </a:p>
-          <a:p>
-            <a:pPr>
-              <a:spcAft>
-                <a:spcPts val="800"/>
-              </a:spcAft>
-            </a:pPr>
-            <a:r>
-              <a:rPr sz="1600" b="0">
-                <a:solidFill>
-                  <a:srgbClr val="1E293B"/>
-                </a:solidFill>
-                <a:latin typeface="Calibri"/>
-              </a:rPr>
-              <a:t>•  Session authentication — JWT, permission guards on every API</a:t>
-            </a:r>
-          </a:p>
-        </p:txBody>
-      </p:sp>
-      <p:sp>
-        <p:nvSpPr>
-          <p:cNvPr id="6" name="TextBox 5"/>
-          <p:cNvSpPr txBox="1"/>
-          <p:nvPr/>
-        </p:nvSpPr>
-        <p:spPr>
-          <a:xfrm>
-            <a:off x="548640" y="5989320"/>
-            <a:ext cx="11094415" cy="411480"/>
-          </a:xfrm>
-          <a:prstGeom prst="rect">
-            <a:avLst/>
-          </a:prstGeom>
-          <a:noFill/>
-        </p:spPr>
-        <p:txBody>
           <a:bodyPr wrap="none">
             <a:spAutoFit/>
           </a:bodyPr>
@@ -5062,7 +5373,7 @@
                 </a:solidFill>
                 <a:latin typeface="Calibri"/>
               </a:rPr>
-              <a:t>Demo pointer: Audit Trail page — filter last 24 hours</a:t>
+              <a:t>Login: admin@egip.local / Admin@123 · ee.kpg@egip.local / EE@123</a:t>
             </a:r>
           </a:p>
         </p:txBody>
@@ -8524,7 +8835,7 @@
                 </a:solidFill>
                 <a:latin typeface="Calibri"/>
               </a:rPr>
-              <a:t>Planning &amp; Construction — Live Modules</a:t>
+              <a:t>Stage 1–2: DPR &amp; Approval</a:t>
             </a:r>
           </a:p>
           <a:p>
@@ -8535,7 +8846,7 @@
                 </a:solidFill>
                 <a:latin typeface="Calibri"/>
               </a:rPr>
-              <a:t>योजना एवं निर्माण</a:t>
+              <a:t>योजना पाइपलाइन (12 चरण)</a:t>
             </a:r>
           </a:p>
         </p:txBody>
@@ -8574,7 +8885,7 @@
                 </a:solidFill>
                 <a:latin typeface="Calibri"/>
               </a:rPr>
-              <a:t>1.  DPR &amp; Planning Management — 12-stage approval</a:t>
+              <a:t>1.  DPR proposal initiation (Division EE/JE)</a:t>
             </a:r>
           </a:p>
           <a:p>
@@ -8590,7 +8901,7 @@
                 </a:solidFill>
                 <a:latin typeface="Calibri"/>
               </a:rPr>
-              <a:t>2.  Construction Management — progress dashboard</a:t>
+              <a:t>2.  HQ review → TAC → Secretariat → Sanction</a:t>
             </a:r>
           </a:p>
           <a:p>
@@ -8606,71 +8917,41 @@
                 </a:solidFill>
                 <a:latin typeface="Calibri"/>
               </a:rPr>
-              <a:t>3.  MB Management — measurement &amp; verification</a:t>
-            </a:r>
-          </a:p>
-          <a:p>
-            <a:pPr>
-              <a:spcAft>
-                <a:spcPts val="600"/>
-              </a:spcAft>
-            </a:pPr>
-            <a:r>
-              <a:rPr sz="1500" b="0">
-                <a:solidFill>
-                  <a:srgbClr val="1E293B"/>
-                </a:solidFill>
-                <a:latin typeface="Calibri"/>
-              </a:rPr>
-              <a:t>4.  BOQ &amp; Quantity Reconciliation</a:t>
-            </a:r>
-          </a:p>
-          <a:p>
-            <a:pPr>
-              <a:spcAft>
-                <a:spcPts val="600"/>
-              </a:spcAft>
-            </a:pPr>
-            <a:r>
-              <a:rPr sz="1500" b="0">
-                <a:solidFill>
-                  <a:srgbClr val="1E293B"/>
-                </a:solidFill>
-                <a:latin typeface="Calibri"/>
-              </a:rPr>
-              <a:t>5.  RA Bill &amp; Contractor Payment</a:t>
-            </a:r>
-          </a:p>
-          <a:p>
-            <a:pPr>
-              <a:spcAft>
-                <a:spcPts val="600"/>
-              </a:spcAft>
-            </a:pPr>
-            <a:r>
-              <a:rPr sz="1500" b="0">
-                <a:solidFill>
-                  <a:srgbClr val="1E293B"/>
-                </a:solidFill>
-                <a:latin typeface="Calibri"/>
-              </a:rPr>
-              <a:t>6.  Final Bill &amp; Project Closure</a:t>
-            </a:r>
-          </a:p>
-          <a:p>
-            <a:pPr>
-              <a:spcAft>
-                <a:spcPts val="600"/>
-              </a:spcAft>
-            </a:pPr>
-            <a:r>
-              <a:rPr sz="1500" b="0">
-                <a:solidFill>
-                  <a:srgbClr val="1E293B"/>
-                </a:solidFill>
-                <a:latin typeface="Calibri"/>
-              </a:rPr>
-              <a:t>7.  Land Acquisition Management — GIS parcel trace</a:t>
+              <a:t>3.  Tender published → ready for project</a:t>
+            </a:r>
+          </a:p>
+        </p:txBody>
+      </p:sp>
+      <p:sp>
+        <p:nvSpPr>
+          <p:cNvPr id="6" name="TextBox 5"/>
+          <p:cNvSpPr txBox="1"/>
+          <p:nvPr/>
+        </p:nvSpPr>
+        <p:spPr>
+          <a:xfrm>
+            <a:off x="548640" y="5989320"/>
+            <a:ext cx="11094415" cy="411480"/>
+          </a:xfrm>
+          <a:prstGeom prst="rect">
+            <a:avLst/>
+          </a:prstGeom>
+          <a:noFill/>
+        </p:spPr>
+        <p:txBody>
+          <a:bodyPr wrap="none">
+            <a:spAutoFit/>
+          </a:bodyPr>
+          <a:lstStyle/>
+          <a:p>
+            <a:r>
+              <a:rPr sz="1100" b="0">
+                <a:solidFill>
+                  <a:srgbClr val="64748B"/>
+                </a:solidFill>
+                <a:latin typeface="Calibri"/>
+              </a:rPr>
+              <a:t>Screens: /dpr-planning · /workflows</a:t>
             </a:r>
           </a:p>
         </p:txBody>
@@ -8808,7 +9089,18 @@
                 </a:solidFill>
                 <a:latin typeface="Calibri"/>
               </a:rPr>
-              <a:t>GIS, Operations &amp; Revenue — Live Modules</a:t>
+              <a:t>Stage 3–4: Land &amp; Project</a:t>
+            </a:r>
+          </a:p>
+          <a:p>
+            <a:r>
+              <a:rPr sz="1800" b="0">
+                <a:solidFill>
+                  <a:srgbClr val="F97316"/>
+                </a:solidFill>
+                <a:latin typeface="Calibri"/>
+              </a:rPr>
+              <a:t>भूमि अधिग्रहण → परियोजना पंजीकरण</a:t>
             </a:r>
           </a:p>
         </p:txBody>
@@ -8822,7 +9114,7 @@
         <p:spPr>
           <a:xfrm>
             <a:off x="685800" y="1691640"/>
-            <a:ext cx="10820095" cy="3200400"/>
+            <a:ext cx="10820095" cy="4526280"/>
           </a:xfrm>
           <a:prstGeom prst="rect">
             <a:avLst/>
@@ -8837,135 +9129,65 @@
           <a:p>
             <a:pPr>
               <a:spcAft>
-                <a:spcPts val="1000"/>
+                <a:spcPts val="800"/>
               </a:spcAft>
             </a:pPr>
             <a:r>
-              <a:rPr sz="1600" b="1">
-                <a:solidFill>
-                  <a:srgbClr val="0F172A"/>
-                </a:solidFill>
-                <a:latin typeface="Calibri"/>
-              </a:rPr>
-              <a:t>GIS &amp; Assets: </a:t>
-            </a:r>
-            <a:r>
               <a:rPr sz="1600" b="0">
                 <a:solidFill>
                   <a:srgbClr val="1E293B"/>
                 </a:solidFill>
                 <a:latin typeface="Calibri"/>
               </a:rPr>
-              <a:t>Web map explorer, asset registry, feature classes</a:t>
+              <a:t>•  GIS pipeline trace + parcel clearances (/land-acquisition)</a:t>
             </a:r>
           </a:p>
           <a:p>
             <a:pPr>
               <a:spcAft>
-                <a:spcPts val="1000"/>
+                <a:spcPts val="800"/>
               </a:spcAft>
             </a:pPr>
             <a:r>
-              <a:rPr sz="1600" b="1">
-                <a:solidFill>
-                  <a:srgbClr val="0F172A"/>
-                </a:solidFill>
-                <a:latin typeface="Calibri"/>
-              </a:rPr>
-              <a:t>Operations: </a:t>
-            </a:r>
-            <a:r>
               <a:rPr sz="1600" b="0">
                 <a:solidFill>
                   <a:srgbClr val="1E293B"/>
                 </a:solidFill>
                 <a:latin typeface="Calibri"/>
               </a:rPr>
-              <a:t>O&amp;M workflow (14 stages), SCADA/IoT, water quality, complaints, consumers</a:t>
+              <a:t>•  HQ / Super Admin registers project from tender-published DPR (/projects)</a:t>
             </a:r>
           </a:p>
           <a:p>
             <a:pPr>
               <a:spcAft>
-                <a:spcPts val="1000"/>
+                <a:spcPts val="800"/>
               </a:spcAft>
             </a:pPr>
             <a:r>
-              <a:rPr sz="1600" b="1">
-                <a:solidFill>
-                  <a:srgbClr val="0F172A"/>
-                </a:solidFill>
-                <a:latin typeface="Calibri"/>
-              </a:rPr>
-              <a:t>Commercial: </a:t>
-            </a:r>
-            <a:r>
               <a:rPr sz="1600" b="0">
                 <a:solidFill>
                   <a:srgbClr val="1E293B"/>
                 </a:solidFill>
                 <a:latin typeface="Calibri"/>
               </a:rPr>
-              <a:t>Billing &amp; revenue, ERP/GL integration, 15.12 reports</a:t>
+              <a:t>•  Division staff logins auto-provisioned (JE, AE, EE, Accounts)</a:t>
             </a:r>
           </a:p>
           <a:p>
             <a:pPr>
               <a:spcAft>
-                <a:spcPts val="1000"/>
+                <a:spcPts val="800"/>
               </a:spcAft>
             </a:pPr>
             <a:r>
-              <a:rPr sz="1600" b="1">
-                <a:solidFill>
-                  <a:srgbClr val="0F172A"/>
-                </a:solidFill>
-                <a:latin typeface="Calibri"/>
-              </a:rPr>
-              <a:t>Intelligence: </a:t>
-            </a:r>
-            <a:r>
               <a:rPr sz="1600" b="0">
                 <a:solidFill>
                   <a:srgbClr val="1E293B"/>
                 </a:solidFill>
                 <a:latin typeface="Calibri"/>
               </a:rPr>
-              <a:t>Executive dashboard, asset lifecycle, analytics</a:t>
-            </a:r>
-          </a:p>
-        </p:txBody>
-      </p:sp>
-      <p:sp>
-        <p:nvSpPr>
-          <p:cNvPr id="6" name="TextBox 5"/>
-          <p:cNvSpPr txBox="1"/>
-          <p:nvPr/>
-        </p:nvSpPr>
-        <p:spPr>
-          <a:xfrm>
-            <a:off x="548640" y="5989320"/>
-            <a:ext cx="11094415" cy="411480"/>
-          </a:xfrm>
-          <a:prstGeom prst="rect">
-            <a:avLst/>
-          </a:prstGeom>
-          <a:noFill/>
-        </p:spPr>
-        <p:txBody>
-          <a:bodyPr wrap="none">
-            <a:spAutoFit/>
-          </a:bodyPr>
-          <a:lstStyle/>
-          <a:p>
-            <a:r>
-              <a:rPr sz="1100" b="0">
-                <a:solidFill>
-                  <a:srgbClr val="64748B"/>
-                </a:solidFill>
-                <a:latin typeface="Calibri"/>
-              </a:rPr>
-              <a:t>Partial (roadmap): Mobile workforce expansion, enterprise DMS, QR scan app, ML predictive maintenance</a:t>
+              <a:t>•  Milestones and budget auto-linked to approved DPR</a:t>
             </a:r>
           </a:p>
         </p:txBody>
@@ -9103,7 +9325,7 @@
                 </a:solidFill>
                 <a:latin typeface="Calibri"/>
               </a:rPr>
-              <a:t>Location Is the Common Thread</a:t>
+              <a:t>Stage 5–6: GIS &amp; Construction</a:t>
             </a:r>
           </a:p>
           <a:p>
@@ -9114,7 +9336,7 @@
                 </a:solidFill>
                 <a:latin typeface="Calibri"/>
               </a:rPr>
-              <a:t>GIS — हर asset और scheme map पर</a:t>
+              <a:t>मानचित्र पर निर्माण — हर रुपये का हिसाब</a:t>
             </a:r>
           </a:p>
         </p:txBody>
@@ -9153,7 +9375,7 @@
                 </a:solidFill>
                 <a:latin typeface="Calibri"/>
               </a:rPr>
-              <a:t>•  District-locked map jurisdiction (Dehradun, Haridwar envelopes)</a:t>
+              <a:t>•  Map assets: pipe, reservoir, FHTC (/map)</a:t>
             </a:r>
           </a:p>
           <a:p>
@@ -9169,7 +9391,7 @@
                 </a:solidFill>
                 <a:latin typeface="Calibri"/>
               </a:rPr>
-              <a:t>•  Pipeline, reservoir, FHTC layers linked to projects</a:t>
+              <a:t>•  Daily DPR → MB → BOQ reconciliation → RA Bill</a:t>
             </a:r>
           </a:p>
           <a:p>
@@ -9185,7 +9407,7 @@
                 </a:solidFill>
                 <a:latin typeface="Calibri"/>
               </a:rPr>
-              <a:t>•  Land acquisition: auto alignment trace + cadastral intersect</a:t>
+              <a:t>•  JE → AE → EE approval chain with full audit trail</a:t>
             </a:r>
           </a:p>
           <a:p>
@@ -9201,23 +9423,7 @@
                 </a:solidFill>
                 <a:latin typeface="Calibri"/>
               </a:rPr>
-              <a:t>•  Revenue GIS analytics — collection by geography</a:t>
-            </a:r>
-          </a:p>
-          <a:p>
-            <a:pPr>
-              <a:spcAft>
-                <a:spcPts val="800"/>
-              </a:spcAft>
-            </a:pPr>
-            <a:r>
-              <a:rPr sz="1600" b="0">
-                <a:solidFill>
-                  <a:srgbClr val="1E293B"/>
-                </a:solidFill>
-                <a:latin typeface="Calibri"/>
-              </a:rPr>
-              <a:t>•  Satellite basemap (Google / Esri) for field verification</a:t>
+              <a:t>•  Physical % and financial % on construction dashboard</a:t>
             </a:r>
           </a:p>
         </p:txBody>
@@ -9251,7 +9457,7 @@
                 </a:solidFill>
                 <a:latin typeface="Calibri"/>
               </a:rPr>
-              <a:t>Demo: Map Explorer → toggle Dehradun district → show scheme assets</a:t>
+              <a:t>Screen: /projects/{id}/construction</a:t>
             </a:r>
           </a:p>
         </p:txBody>
@@ -9389,7 +9595,7 @@
                 </a:solidFill>
                 <a:latin typeface="Calibri"/>
               </a:rPr>
-              <a:t>Demo 1 — Command Center</a:t>
+              <a:t>Stage 7: Handover to O&amp;M</a:t>
             </a:r>
           </a:p>
           <a:p>
@@ -9400,7 +9606,7 @@
                 </a:solidFill>
                 <a:latin typeface="Calibri"/>
               </a:rPr>
-              <a:t>कार्यकारी डैशबोर्ड</a:t>
+              <a:t>कमीशनिंग व O&amp;M सौंपना</a:t>
             </a:r>
           </a:p>
         </p:txBody>
@@ -9413,8 +9619,8 @@
         </p:nvSpPr>
         <p:spPr>
           <a:xfrm>
-            <a:off x="685800" y="1600200"/>
-            <a:ext cx="10820095" cy="4617720"/>
+            <a:off x="685800" y="1691640"/>
+            <a:ext cx="10820095" cy="4526280"/>
           </a:xfrm>
           <a:prstGeom prst="rect">
             <a:avLst/>
@@ -9433,13 +9639,13 @@
               </a:spcAft>
             </a:pPr>
             <a:r>
-              <a:rPr sz="1400" b="0">
+              <a:rPr sz="1600" b="0">
                 <a:solidFill>
                   <a:srgbClr val="1E293B"/>
                 </a:solidFill>
                 <a:latin typeface="Calibri"/>
               </a:rPr>
-              <a:t>•  Login: admin@egip.local / Admin@123</a:t>
+              <a:t>•  Completion checklist — MB, GIS, FHTC, commissioning certificates</a:t>
             </a:r>
           </a:p>
           <a:p>
@@ -9449,13 +9655,13 @@
               </a:spcAft>
             </a:pPr>
             <a:r>
-              <a:rPr sz="1400" b="0">
+              <a:rPr sz="1600" b="0">
                 <a:solidFill>
                   <a:srgbClr val="1E293B"/>
                 </a:solidFill>
                 <a:latin typeface="Calibri"/>
               </a:rPr>
-              <a:t>•  Navigate: Sidebar → Executive Dashboard (/dashboard)</a:t>
+              <a:t>•  Handover certificate + asset register</a:t>
             </a:r>
           </a:p>
           <a:p>
@@ -9465,125 +9671,47 @@
               </a:spcAft>
             </a:pPr>
             <a:r>
-              <a:rPr sz="1400" b="0">
+              <a:rPr sz="1600" b="0">
                 <a:solidFill>
                   <a:srgbClr val="1E293B"/>
                 </a:solidFill>
                 <a:latin typeface="Calibri"/>
               </a:rPr>
-              <a:t>•  </a:t>
-            </a:r>
-          </a:p>
-          <a:p>
-            <a:pPr>
-              <a:spcAft>
-                <a:spcPts val="800"/>
-              </a:spcAft>
-            </a:pPr>
-            <a:r>
-              <a:rPr sz="1400" b="0">
-                <a:solidFill>
-                  <a:srgbClr val="1E293B"/>
-                </a:solidFill>
-                <a:latin typeface="Calibri"/>
-              </a:rPr>
-              <a:t>•  Show:</a:t>
-            </a:r>
-          </a:p>
-          <a:p>
-            <a:pPr>
-              <a:spcAft>
-                <a:spcPts val="800"/>
-              </a:spcAft>
-            </a:pPr>
-            <a:r>
-              <a:rPr sz="1400" b="0">
-                <a:solidFill>
-                  <a:srgbClr val="1E293B"/>
-                </a:solidFill>
-                <a:latin typeface="Calibri"/>
-              </a:rPr>
-              <a:t>•    • Five KPI cards — assets, alerts, critical assets, project progress, health</a:t>
-            </a:r>
-          </a:p>
-          <a:p>
-            <a:pPr>
-              <a:spcAft>
-                <a:spcPts val="800"/>
-              </a:spcAft>
-            </a:pPr>
-            <a:r>
-              <a:rPr sz="1400" b="0">
-                <a:solidFill>
-                  <a:srgbClr val="1E293B"/>
-                </a:solidFill>
-                <a:latin typeface="Calibri"/>
-              </a:rPr>
-              <a:t>•    • Project progress chart — Clement Town &amp; Bahadarabad schemes</a:t>
-            </a:r>
-          </a:p>
-          <a:p>
-            <a:pPr>
-              <a:spcAft>
-                <a:spcPts val="800"/>
-              </a:spcAft>
-            </a:pPr>
-            <a:r>
-              <a:rPr sz="1400" b="0">
-                <a:solidFill>
-                  <a:srgbClr val="1E293B"/>
-                </a:solidFill>
-                <a:latin typeface="Calibri"/>
-              </a:rPr>
-              <a:t>•    • Critical assets table</a:t>
-            </a:r>
-          </a:p>
-          <a:p>
-            <a:pPr>
-              <a:spcAft>
-                <a:spcPts val="800"/>
-              </a:spcAft>
-            </a:pPr>
-            <a:r>
-              <a:rPr sz="1400" b="0">
-                <a:solidFill>
-                  <a:srgbClr val="1E293B"/>
-                </a:solidFill>
-                <a:latin typeface="Calibri"/>
-              </a:rPr>
-              <a:t>•    • Link to 20 platform modules</a:t>
-            </a:r>
-          </a:p>
-          <a:p>
-            <a:pPr>
-              <a:spcAft>
-                <a:spcPts val="800"/>
-              </a:spcAft>
-            </a:pPr>
-            <a:r>
-              <a:rPr sz="1400" b="0">
-                <a:solidFill>
-                  <a:srgbClr val="1E293B"/>
-                </a:solidFill>
-                <a:latin typeface="Calibri"/>
-              </a:rPr>
-              <a:t>•  </a:t>
-            </a:r>
-          </a:p>
-          <a:p>
-            <a:pPr>
-              <a:spcAft>
-                <a:spcPts val="800"/>
-              </a:spcAft>
-            </a:pPr>
-            <a:r>
-              <a:rPr sz="1400" b="0">
-                <a:solidFill>
-                  <a:srgbClr val="1E293B"/>
-                </a:solidFill>
-                <a:latin typeface="Calibri"/>
-              </a:rPr>
-              <a:t>•  Script: "From one screen, leadership sees statewide health. Each KPI is live from PostgreSQL — not a static report."</a:t>
+              <a:t>•  Scheme becomes operational for billing and consumer service</a:t>
+            </a:r>
+          </a:p>
+        </p:txBody>
+      </p:sp>
+      <p:sp>
+        <p:nvSpPr>
+          <p:cNvPr id="6" name="TextBox 5"/>
+          <p:cNvSpPr txBox="1"/>
+          <p:nvPr/>
+        </p:nvSpPr>
+        <p:spPr>
+          <a:xfrm>
+            <a:off x="548640" y="5989320"/>
+            <a:ext cx="11094415" cy="411480"/>
+          </a:xfrm>
+          <a:prstGeom prst="rect">
+            <a:avLst/>
+          </a:prstGeom>
+          <a:noFill/>
+        </p:spPr>
+        <p:txBody>
+          <a:bodyPr wrap="none">
+            <a:spAutoFit/>
+          </a:bodyPr>
+          <a:lstStyle/>
+          <a:p>
+            <a:r>
+              <a:rPr sz="1100" b="0">
+                <a:solidFill>
+                  <a:srgbClr val="64748B"/>
+                </a:solidFill>
+                <a:latin typeface="Calibri"/>
+              </a:rPr>
+              <a:t>Screen: /om#handover</a:t>
             </a:r>
           </a:p>
         </p:txBody>
@@ -9721,7 +9849,7 @@
                 </a:solidFill>
                 <a:latin typeface="Calibri"/>
               </a:rPr>
-              <a:t>Demo 2 — Scheme Execution</a:t>
+              <a:t>Stage 8–9: Consumers &amp; Revenue</a:t>
             </a:r>
           </a:p>
           <a:p>
@@ -9732,7 +9860,7 @@
                 </a:solidFill>
                 <a:latin typeface="Calibri"/>
               </a:rPr>
-              <a:t>निर्माण प्रवाह</a:t>
+              <a:t>FHTC पंजीकरण → बिलिंग → राजस्व</a:t>
             </a:r>
           </a:p>
         </p:txBody>
@@ -9745,8 +9873,8 @@
         </p:nvSpPr>
         <p:spPr>
           <a:xfrm>
-            <a:off x="685800" y="1600200"/>
-            <a:ext cx="10820095" cy="4617720"/>
+            <a:off x="685800" y="1691640"/>
+            <a:ext cx="10820095" cy="4526280"/>
           </a:xfrm>
           <a:prstGeom prst="rect">
             <a:avLst/>
@@ -9761,177 +9889,99 @@
           <a:p>
             <a:pPr>
               <a:spcAft>
-                <a:spcPts val="800"/>
+                <a:spcPts val="600"/>
               </a:spcAft>
             </a:pPr>
             <a:r>
-              <a:rPr sz="1400" b="0">
+              <a:rPr sz="1500" b="0">
                 <a:solidFill>
                   <a:srgbClr val="1E293B"/>
                 </a:solidFill>
                 <a:latin typeface="Calibri"/>
               </a:rPr>
-              <a:t>•  Login: je.dnn@egip.local / JE@123 (Dehradun North JE)</a:t>
+              <a:t>1.  Register consumer (FHTC + mobile) linked to scheme</a:t>
             </a:r>
           </a:p>
           <a:p>
             <a:pPr>
               <a:spcAft>
-                <a:spcPts val="800"/>
+                <a:spcPts val="600"/>
               </a:spcAft>
             </a:pPr>
             <a:r>
-              <a:rPr sz="1400" b="0">
+              <a:rPr sz="1500" b="0">
                 <a:solidFill>
                   <a:srgbClr val="1E293B"/>
                 </a:solidFill>
                 <a:latin typeface="Calibri"/>
               </a:rPr>
-              <a:t>•  Navigate: Projects → Clement Town Water Supply Scheme</a:t>
+              <a:t>2.  Meter reading via mobile billing (/mobile-billing)</a:t>
             </a:r>
           </a:p>
           <a:p>
             <a:pPr>
               <a:spcAft>
-                <a:spcPts val="800"/>
+                <a:spcPts val="600"/>
               </a:spcAft>
             </a:pPr>
             <a:r>
-              <a:rPr sz="1400" b="0">
+              <a:rPr sz="1500" b="0">
                 <a:solidFill>
                   <a:srgbClr val="1E293B"/>
                 </a:solidFill>
                 <a:latin typeface="Calibri"/>
               </a:rPr>
-              <a:t>•  </a:t>
+              <a:t>3.  Bill generation → collection and arrears tracking</a:t>
             </a:r>
           </a:p>
           <a:p>
             <a:pPr>
               <a:spcAft>
-                <a:spcPts val="800"/>
+                <a:spcPts val="600"/>
               </a:spcAft>
             </a:pPr>
             <a:r>
-              <a:rPr sz="1400" b="0">
+              <a:rPr sz="1500" b="0">
                 <a:solidFill>
                   <a:srgbClr val="1E293B"/>
                 </a:solidFill>
                 <a:latin typeface="Calibri"/>
               </a:rPr>
-              <a:t>•  Show:</a:t>
-            </a:r>
-          </a:p>
-          <a:p>
-            <a:pPr>
-              <a:spcAft>
-                <a:spcPts val="800"/>
-              </a:spcAft>
-            </a:pPr>
-            <a:r>
-              <a:rPr sz="1400" b="0">
-                <a:solidFill>
-                  <a:srgbClr val="1E293B"/>
-                </a:solidFill>
-                <a:latin typeface="Calibri"/>
-              </a:rPr>
-              <a:t>•    • Construction dashboard — physical 72% / financial 65%</a:t>
-            </a:r>
-          </a:p>
-          <a:p>
-            <a:pPr>
-              <a:spcAft>
-                <a:spcPts val="800"/>
-              </a:spcAft>
-            </a:pPr>
-            <a:r>
-              <a:rPr sz="1400" b="0">
-                <a:solidFill>
-                  <a:srgbClr val="1E293B"/>
-                </a:solidFill>
-                <a:latin typeface="Calibri"/>
-              </a:rPr>
-              <a:t>•    • MB entry (measurement book)</a:t>
-            </a:r>
-          </a:p>
-          <a:p>
-            <a:pPr>
-              <a:spcAft>
-                <a:spcPts val="800"/>
-              </a:spcAft>
-            </a:pPr>
-            <a:r>
-              <a:rPr sz="1400" b="0">
-                <a:solidFill>
-                  <a:srgbClr val="1E293B"/>
-                </a:solidFill>
-                <a:latin typeface="Calibri"/>
-              </a:rPr>
-              <a:t>•    • BOQ reconciliation</a:t>
-            </a:r>
-          </a:p>
-          <a:p>
-            <a:pPr>
-              <a:spcAft>
-                <a:spcPts val="800"/>
-              </a:spcAft>
-            </a:pPr>
-            <a:r>
-              <a:rPr sz="1400" b="0">
-                <a:solidFill>
-                  <a:srgbClr val="1E293B"/>
-                </a:solidFill>
-                <a:latin typeface="Calibri"/>
-              </a:rPr>
-              <a:t>•    • RA Bill pending AE approval</a:t>
-            </a:r>
-          </a:p>
-          <a:p>
-            <a:pPr>
-              <a:spcAft>
-                <a:spcPts val="800"/>
-              </a:spcAft>
-            </a:pPr>
-            <a:r>
-              <a:rPr sz="1400" b="0">
-                <a:solidFill>
-                  <a:srgbClr val="1E293B"/>
-                </a:solidFill>
-                <a:latin typeface="Calibri"/>
-              </a:rPr>
-              <a:t>•    • Workflow inbox — approve as AE (ae.dnn@egip.local)</a:t>
-            </a:r>
-          </a:p>
-          <a:p>
-            <a:pPr>
-              <a:spcAft>
-                <a:spcPts val="800"/>
-              </a:spcAft>
-            </a:pPr>
-            <a:r>
-              <a:rPr sz="1400" b="0">
-                <a:solidFill>
-                  <a:srgbClr val="1E293B"/>
-                </a:solidFill>
-                <a:latin typeface="Calibri"/>
-              </a:rPr>
-              <a:t>•  </a:t>
-            </a:r>
-          </a:p>
-          <a:p>
-            <a:pPr>
-              <a:spcAft>
-                <a:spcPts val="800"/>
-              </a:spcAft>
-            </a:pPr>
-            <a:r>
-              <a:rPr sz="1400" b="0">
-                <a:solidFill>
-                  <a:srgbClr val="1E293B"/>
-                </a:solidFill>
-                <a:latin typeface="Calibri"/>
-              </a:rPr>
-              <a:t>•  Script: "Division staff see only their schemes. JE measures, AE checks, EE approves — full audit trail."</a:t>
+              <a:t>4.  15.12 reports · revenue GIS analytics by geography</a:t>
+            </a:r>
+          </a:p>
+        </p:txBody>
+      </p:sp>
+      <p:sp>
+        <p:nvSpPr>
+          <p:cNvPr id="6" name="TextBox 5"/>
+          <p:cNvSpPr txBox="1"/>
+          <p:nvPr/>
+        </p:nvSpPr>
+        <p:spPr>
+          <a:xfrm>
+            <a:off x="548640" y="5989320"/>
+            <a:ext cx="11094415" cy="411480"/>
+          </a:xfrm>
+          <a:prstGeom prst="rect">
+            <a:avLst/>
+          </a:prstGeom>
+          <a:noFill/>
+        </p:spPr>
+        <p:txBody>
+          <a:bodyPr wrap="none">
+            <a:spAutoFit/>
+          </a:bodyPr>
+          <a:lstStyle/>
+          <a:p>
+            <a:r>
+              <a:rPr sz="1100" b="0">
+                <a:solidFill>
+                  <a:srgbClr val="64748B"/>
+                </a:solidFill>
+                <a:latin typeface="Calibri"/>
+              </a:rPr>
+              <a:t>Screens: /billing · /mobile-billing</a:t>
             </a:r>
           </a:p>
         </p:txBody>
